--- a/en/slides/10-Computer_Architecture-Electronics-Code.pptx
+++ b/en/slides/10-Computer_Architecture-Electronics-Code.pptx
@@ -120,27 +120,31 @@
   <p:extLst>
     <p:ext uri="{521415D9-36F7-43E2-AB2F-B90AF26B5E84}">
       <p14:sectionLst xmlns:p14="http://schemas.microsoft.com/office/powerpoint/2010/main">
-        <p14:section name="Opening" id="{16301b98-ba6b-27a4-9142-879317ca2a23}">
+        <p14:section name="Opening" id="{829a7689-70fb-67ab-6a1f-b062990f18e4}">
           <p14:sldIdLst>
             <p14:sldId id="256"/>
             <p14:sldId id="257"/>
           </p14:sldIdLst>
         </p14:section>
-        <p14:section name="The listings" id="{50debb86-2f5b-bf01-f9be-8e7fb0a3b115}">
+        <p14:section name="Warm-up on the machine" id="{134447cf-15d3-eccb-5e7b-ce7a81f764b8}">
           <p14:sldIdLst>
             <p14:sldId id="258"/>
+          </p14:sldIdLst>
+        </p14:section>
+        <p14:section name="Back to the machine" id="{25dea76c-e103-b369-eed5-c254cbd5b266}">
+          <p14:sldIdLst>
             <p14:sldId id="259"/>
             <p14:sldId id="260"/>
           </p14:sldIdLst>
         </p14:section>
-        <p14:section name="The complete program" id="{fd775411-05e7-0aed-f2d9-9d6a62ee1fd0}">
+        <p14:section name="The complete program" id="{dfca923f-0fa6-0f6e-3ba4-6bcd5f82e65b}">
           <p14:sldIdLst>
             <p14:sldId id="261"/>
             <p14:sldId id="262"/>
             <p14:sldId id="263"/>
           </p14:sldIdLst>
         </p14:section>
-        <p14:section name="Run it and test it" id="{2ce99cd1-6e32-d245-dfdd-67b08f641876}">
+        <p14:section name="Run it and test it" id="{aebc09dd-ec49-fb95-281b-ec5fb777407e}">
           <p14:sldIdLst>
             <p14:sldId id="264"/>
             <p14:sldId id="265"/>
@@ -149,7 +153,7 @@
             <p14:sldId id="268"/>
           </p14:sldIdLst>
         </p14:section>
-        <p14:section name="Exercises" id="{d469ae1d-a08c-9b50-adb9-17c966beac65}">
+        <p14:section name="Exercises" id="{a00be6ea-bb03-221f-01a0-05fb70ef33a6}">
           <p14:sldIdLst>
             <p14:sldId id="269"/>
           </p14:sldIdLst>
@@ -2689,7 +2693,63 @@
       </p:sp>
       <p:sp>
         <p:nvSpPr>
-          <p:cNvPr id="11" name="Shape 9"/>
+          <p:cNvPr id="11" name="Text 9"/>
+          <p:cNvSpPr txBox="1"/>
+          <p:nvPr/>
+        </p:nvSpPr>
+        <p:spPr>
+          <a:xfrm>
+            <a:off x="4693615" y="566928"/>
+            <a:ext cx="6949440" cy="640080"/>
+          </a:xfrm>
+          <a:prstGeom prst="rect">
+            <a:avLst/>
+          </a:prstGeom>
+          <a:noFill/>
+          <a:ln/>
+        </p:spPr>
+        <p:txBody>
+          <a:bodyPr wrap="square" lIns="0" tIns="0" rIns="0" bIns="0" rtlCol="0" anchor="t"/>
+          <a:lstStyle/>
+          <a:p>
+            <a:pPr algn="r" indent="0" marL="0">
+              <a:buNone/>
+            </a:pPr>
+            <a:r>
+              <a:rPr lang="en-US" sz="1300" dirty="0">
+                <a:solidFill>
+                  <a:srgbClr val="CFE3EA"/>
+                </a:solidFill>
+                <a:latin typeface="Calibri" pitchFamily="34" charset="0"/>
+                <a:ea typeface="Calibri" pitchFamily="34" charset="-122"/>
+                <a:cs typeface="Calibri" pitchFamily="34" charset="-120"/>
+              </a:rPr>
+              <a:t>Code deck. The concepts, the figures and the questions are in the lecture deck:</a:t>
+            </a:r>
+            <a:endParaRPr lang="en-US" sz="1300" dirty="0"/>
+          </a:p>
+          <a:p>
+            <a:pPr algn="r" indent="0" marL="0">
+              <a:buNone/>
+            </a:pPr>
+            <a:r>
+              <a:rPr lang="en-US" sz="1300" dirty="0">
+                <a:solidFill>
+                  <a:srgbClr val="CFE3EA"/>
+                </a:solidFill>
+                <a:latin typeface="Calibri" pitchFamily="34" charset="0"/>
+                <a:ea typeface="Calibri" pitchFamily="34" charset="-122"/>
+                <a:cs typeface="Calibri" pitchFamily="34" charset="-120"/>
+              </a:rPr>
+              <a:t>10-Computer_Architecture-Electronics.pptx</a:t>
+            </a:r>
+            <a:endParaRPr lang="en-US" sz="1300" dirty="0"/>
+          </a:p>
+        </p:txBody>
+      </p:sp>
+      <p:sp>
+        <p:nvSpPr>
+          <p:cNvPr id="12" name="Shape 10"/>
           <p:cNvSpPr/>
           <p:nvPr/>
         </p:nvSpPr>
@@ -2716,7 +2776,7 @@
       </p:sp>
       <p:pic>
         <p:nvPicPr>
-          <p:cNvPr id="12" name="Image 0" descr="/Users/raffaelemontella/devel/riscv-prg32/computer-architecture-with-prg32/tools/assets/kit_breadboard.png">    </p:cNvPr>
+          <p:cNvPr id="13" name="Image 0" descr="/Users/raffaelemontella/devel/riscv-prg32/computer-architecture-with-prg32/tools/assets/kit_breadboard.png">    </p:cNvPr>
           <p:cNvPicPr>
             <a:picLocks noChangeAspect="1"/>
           </p:cNvPicPr>
@@ -7501,7 +7561,7 @@
                 <a:ea typeface="Calibri" pitchFamily="34" charset="-122"/>
                 <a:cs typeface="Calibri" pitchFamily="34" charset="-120"/>
               </a:rPr>
-              <a:t>The 1 listing of Lecture 10, one per slide: read the code, then the numbered remarks beside it</a:t>
+              <a:t>The listing of Lecture 10: read the code, then the numbered remarks beside it</a:t>
             </a:r>
             <a:endParaRPr lang="en-US" sz="2200" dirty="0"/>
           </a:p>

--- a/en/slides/10-Computer_Architecture-Electronics-Code.pptx
+++ b/en/slides/10-Computer_Architecture-Electronics-Code.pptx
@@ -120,31 +120,31 @@
   <p:extLst>
     <p:ext uri="{521415D9-36F7-43E2-AB2F-B90AF26B5E84}">
       <p14:sectionLst xmlns:p14="http://schemas.microsoft.com/office/powerpoint/2010/main">
-        <p14:section name="Opening" id="{829a7689-70fb-67ab-6a1f-b062990f18e4}">
+        <p14:section name="Opening" id="{e6b1a8b7-2b79-97d2-a80d-af50a3267310}">
           <p14:sldIdLst>
             <p14:sldId id="256"/>
             <p14:sldId id="257"/>
           </p14:sldIdLst>
         </p14:section>
-        <p14:section name="Warm-up on the machine" id="{134447cf-15d3-eccb-5e7b-ce7a81f764b8}">
+        <p14:section name="Warm-up on the machine" id="{48353009-a99e-22f6-6f53-66403923550e}">
           <p14:sldIdLst>
             <p14:sldId id="258"/>
           </p14:sldIdLst>
         </p14:section>
-        <p14:section name="Back to the machine" id="{25dea76c-e103-b369-eed5-c254cbd5b266}">
+        <p14:section name="Back to the machine" id="{69cd8915-9a27-da35-3bfa-a1ee260d0977}">
           <p14:sldIdLst>
             <p14:sldId id="259"/>
             <p14:sldId id="260"/>
           </p14:sldIdLst>
         </p14:section>
-        <p14:section name="The complete program" id="{dfca923f-0fa6-0f6e-3ba4-6bcd5f82e65b}">
+        <p14:section name="The complete program" id="{37758c11-85ad-550a-f9f4-98c6c80fb480}">
           <p14:sldIdLst>
             <p14:sldId id="261"/>
             <p14:sldId id="262"/>
             <p14:sldId id="263"/>
           </p14:sldIdLst>
         </p14:section>
-        <p14:section name="Run it and test it" id="{aebc09dd-ec49-fb95-281b-ec5fb777407e}">
+        <p14:section name="Run it and test it" id="{16b82549-780c-b41d-d835-757c42fee3c2}">
           <p14:sldIdLst>
             <p14:sldId id="264"/>
             <p14:sldId id="265"/>
@@ -153,7 +153,7 @@
             <p14:sldId id="268"/>
           </p14:sldIdLst>
         </p14:section>
-        <p14:section name="Exercises" id="{a00be6ea-bb03-221f-01a0-05fb70ef33a6}">
+        <p14:section name="Exercises" id="{ff2bde94-4126-e5d4-1a24-96a9e94fe3b8}">
           <p14:sldIdLst>
             <p14:sldId id="269"/>
           </p14:sldIdLst>
@@ -562,7 +562,9 @@
           <a:p>
             <a:r>
               <a:rPr lang="en-US" dirty="0"/>
-              <a:t>This is the code deck of Lecture 10. The lecture deck holds the concepts; this one holds everything you type and run: the listings with their explanation, the complete program, what it shows, and the way to test it on each of the three hosts.</a:t>
+              <a:t>This is the code deck of Lecture 10. The lecture deck holds the concepts; this one holds everything you type and run: the listings with their explanation, the complete program, what it shows, and the way to test it on each of the three hosts.
+Learning status: UNDERSTAND NOW, by the end of this lecture you explain it, trace it and apply it on your own; USE NOW, you follow and use the recipe today; how it works inside is explained later, or is not part of the course; UNDERSTAND LATER, recognise the name and what it is for; a later lecture explains it. A slide without a badge is context: a story, an example, a question, an exercise.
+Learning status of this lecture. UNDERSTAND NOW: pull-up inputs; voltage, current, Ohm's law; the transistor as a switch; from volts to bits; CMOS gates. USE NOW: the complete program, the PRG32 tools (used, not studied, in this course). UNDERSTAND LATER: the clock (Lecture 13). A slide without a badge is context: a story, an example, a question, an exercise.</a:t>
             </a:r>
             <a:endParaRPr lang="en-US" dirty="0"/>
           </a:p>
@@ -651,6 +653,7 @@
             <a:r>
               <a:rPr lang="en-US" dirty="0"/>
               <a:t>The quickest way: PRG32-QT on your own computer. Four steps, each with its command. PRG32-QT behaves like a board on port 8080, which is why the upload command says esp32c6. With debug mode enabled you can stop at any instruction and read registers and memory.
+USE NOW: the PRG32 tools (used, not studied, in this course).
 For the lecturer: Run by the tests: the cartridge of this slide is built with this command and executed on the headless runner of PRG32-QT. Without the toolchain: import the .prg32 file in PRG32-QT and choose Run Cartridge. Keys: arrows or WASD for the joystick, Z or J for A, X or K for B, Enter for Start, Escape to go back to Setup.</a:t>
             </a:r>
             <a:endParaRPr lang="en-US" dirty="0"/>
@@ -740,6 +743,7 @@
             <a:r>
               <a:rPr lang="en-US" dirty="0"/>
               <a:t>The same program on the emulator. QEMU runs the real firmware on an emulated chip, so the cartridge must be built for the architecture qemu. Stage the cartridge while QEMU is closed. The firmware opens on the Setup menu: choose Run Cartridge and the slot. Remember that the keyboard is read by the terminal, not by the window with the picture.
+USE NOW: the PRG32 tools (used, not studied, in this course).
 For the lecturer: Checked by the tests up to the staging: the cartridge is built for the architecture qemu and accepted into the flash image of the emulator. What the emulator then shows is not checked automatically: Espressif QEMU needs its window. Since October 2026 the firmware starts on Setup: choose Run Cartridge, then cart0.</a:t>
             </a:r>
             <a:endParaRPr lang="en-US" dirty="0"/>
@@ -829,6 +833,7 @@
             <a:r>
               <a:rPr lang="en-US" dirty="0"/>
               <a:t>The same program on the kit. The firmware is written once, through USB; after that cartridges travel over Wi-Fi. The upload command is the one used for PRG32-QT with the address of the board. This is the only host that the automatic tests do not run: try it, and report what you see.
+USE NOW: the PRG32 tools (used, not studied, in this course).
 For the lecturer: Not run by the tests: there is no board on the test machine. The cartridge for the architecture esp32c6 is built by the tests; the steps are those of the PRG32 documentation. If the serial port is not found pass it explicitly. To use the Wi-Fi of the classroom: python3 -m prg32 wifi set --ssid NAME --password PASSWORD --mode sta.</a:t>
             </a:r>
             <a:endParaRPr lang="en-US" dirty="0"/>
@@ -918,6 +923,7 @@
             <a:r>
               <a:rPr lang="en-US" dirty="0"/>
               <a:t>The five most common symptoms, what each means, and what to do. Read the message before changing anything: it nearly always names the cause.
+USE NOW: the PRG32 tools (used, not studied, in this course).
 For the lecturer: The first three rows cover most cases. When asking for help, paste the command and the whole message as text. docs/usage/troubleshooting.md of the PRG32 repository has the complete list.</a:t>
             </a:r>
             <a:endParaRPr lang="en-US" dirty="0"/>
@@ -1185,6 +1191,7 @@
             <a:r>
               <a:rPr lang="en-US" dirty="0"/>
               <a:t>In your program a pressed button is a 1. On the board the button LEFT is a switch between a pin of the chip, GPIO18, and ground. When it is pressed the pin is at 0 volts; when it is released the pin is at 3.3 volts. So pressed means 0 volts, and yet the program reads 1. The four callouts turn this into the questions of the lecture: what is a volt, why is the released pin at 3.3 V, and who decides that 0 V is a bit? The last section answers them.
+UNDERSTAND NOW: pull-up inputs.
 For the lecturer: Wiring from the PRG32 hardware documentation: every button is a switch to GND, and the firmware enables the internal pull-up of each input. The runtime inverts the level when it builds the mask (prg32_controller.c): pressed pin low, bit high. The last section of the lecture answers the four callouts.</a:t>
             </a:r>
             <a:endParaRPr lang="en-US" dirty="0"/>
@@ -1274,6 +1281,7 @@
             <a:r>
               <a:rPr lang="en-US" dirty="0"/>
               <a:t>The whole journey in seven steps. The finger closes the switch; the pin falls to 0 V in less than a microsecond; the input buffer sees a voltage below its threshold, a logic 0; the level is captured in a flip-flop; the firmware reads it with a load instruction, inverts it and packs it with the others; your program tests it with andi. The right column says where each step is explained: three in this lecture, the others in lectures you have attended or will attend. Seven layers lie between a finger and a bit.
+UNDERSTAND NOW: pull-up inputs.
 For the lecturer: The contacts of a real switch bounce for a few milliseconds when they close: reading the buttons once per frame, every few tens of milliseconds, hides the bounce (Lecture 21).</a:t>
             </a:r>
             <a:endParaRPr lang="en-US" dirty="0"/>
@@ -1363,6 +1371,7 @@
             <a:r>
               <a:rPr lang="en-US" dirty="0"/>
               <a:t>The kit seen as a circuit. A breadboard has holes joined in rows underneath, so components connect without soldering. Two long buses carry the supply, 3.3 V and ground, and a separate one carries 5 V for the audio amplifiers. Every part shares the same ground: without a common reference the voltages of two parts would mean nothing to each other. Buttons go from a pin to ground; the display and the amplifiers receive digital signals. Never connect a pin that is driven high directly to ground.
+UNDERSTAND NOW: pull-up inputs.
 For the lecturer: Diagram from the PRG32 repository (docs/hardware/images). A pin of the ESP32-C6 can source some tens of milliamperes: an LED needs its series resistor, as computed earlier. Never join a pin driven high directly to ground.</a:t>
             </a:r>
             <a:endParaRPr lang="en-US" dirty="0"/>
@@ -1452,6 +1461,7 @@
             <a:r>
               <a:rPr lang="en-US" dirty="0"/>
               <a:t>One page of the complete program, exactly as it is in the repository. Read it from the top: the header says what the program shows and how to build it; the three functions init, update and draw follow, then the data. Lines that you met in the listings of the lecture have the same comments here.
+USE NOW: the complete program (used, not studied, in this course).
 For the lecturer: code/l10.S, as built and run by the tests. The comments are part of the program: read them with the code.</a:t>
             </a:r>
             <a:endParaRPr lang="en-US" dirty="0"/>
@@ -1541,6 +1551,7 @@
             <a:r>
               <a:rPr lang="en-US" dirty="0"/>
               <a:t>One page of the complete program, exactly as it is in the repository. Read it from the top: the header says what the program shows and how to build it; the three functions init, update and draw follow, then the data. Lines that you met in the listings of the lecture have the same comments here.
+USE NOW: the complete program (used, not studied, in this course).
 For the lecturer: code/l10.S, as built and run by the tests. The comments are part of the program: read them with the code.</a:t>
             </a:r>
             <a:endParaRPr lang="en-US" dirty="0"/>
@@ -1630,6 +1641,7 @@
             <a:r>
               <a:rPr lang="en-US" dirty="0"/>
               <a:t>One page of the complete program, exactly as it is in the repository. Read it from the top: the header says what the program shows and how to build it; the three functions init, update and draw follow, then the data. Lines that you met in the listings of the lecture have the same comments here.
+USE NOW: the complete program (used, not studied, in this course).
 For the lecturer: code/l10.S, as built and run by the tests. The comments are part of the program: read them with the code.</a:t>
             </a:r>
             <a:endParaRPr lang="en-US" dirty="0"/>
@@ -2800,6 +2812,420 @@
       </p:pic>
       <p:sp>
         <p:nvSpPr>
+          <p:cNvPr id="14" name="Shape 11"/>
+          <p:cNvSpPr/>
+          <p:nvPr/>
+        </p:nvSpPr>
+        <p:spPr>
+          <a:xfrm>
+            <a:off x="9690303" y="91440"/>
+            <a:ext cx="1952752" cy="274320"/>
+          </a:xfrm>
+          <a:prstGeom prst="rect">
+            <a:avLst/>
+          </a:prstGeom>
+          <a:solidFill>
+            <a:srgbClr val="F3E8FF"/>
+          </a:solidFill>
+          <a:ln w="12700">
+            <a:solidFill>
+              <a:srgbClr val="7E22CE"/>
+            </a:solidFill>
+            <a:prstDash val="dash"/>
+          </a:ln>
+        </p:spPr>
+      </p:sp>
+      <p:sp>
+        <p:nvSpPr>
+          <p:cNvPr id="15" name="Shape 12"/>
+          <p:cNvSpPr/>
+          <p:nvPr/>
+        </p:nvSpPr>
+        <p:spPr>
+          <a:xfrm>
+            <a:off x="9717735" y="128016"/>
+            <a:ext cx="45720" cy="45720"/>
+          </a:xfrm>
+          <a:prstGeom prst="rect">
+            <a:avLst/>
+          </a:prstGeom>
+          <a:solidFill>
+            <a:srgbClr val="7E22CE"/>
+          </a:solidFill>
+          <a:ln w="12700">
+            <a:solidFill>
+              <a:srgbClr val="7E22CE"/>
+            </a:solidFill>
+            <a:prstDash val="solid"/>
+          </a:ln>
+        </p:spPr>
+      </p:sp>
+      <p:sp>
+        <p:nvSpPr>
+          <p:cNvPr id="16" name="Shape 13"/>
+          <p:cNvSpPr/>
+          <p:nvPr/>
+        </p:nvSpPr>
+        <p:spPr>
+          <a:xfrm>
+            <a:off x="9717735" y="205740"/>
+            <a:ext cx="45720" cy="45720"/>
+          </a:xfrm>
+          <a:prstGeom prst="rect">
+            <a:avLst/>
+          </a:prstGeom>
+          <a:solidFill>
+            <a:srgbClr val="7E22CE"/>
+          </a:solidFill>
+          <a:ln w="12700">
+            <a:solidFill>
+              <a:srgbClr val="7E22CE"/>
+            </a:solidFill>
+            <a:prstDash val="solid"/>
+          </a:ln>
+        </p:spPr>
+      </p:sp>
+      <p:sp>
+        <p:nvSpPr>
+          <p:cNvPr id="17" name="Shape 14"/>
+          <p:cNvSpPr/>
+          <p:nvPr/>
+        </p:nvSpPr>
+        <p:spPr>
+          <a:xfrm>
+            <a:off x="9717735" y="283464"/>
+            <a:ext cx="45720" cy="45720"/>
+          </a:xfrm>
+          <a:prstGeom prst="rect">
+            <a:avLst/>
+          </a:prstGeom>
+          <a:solidFill>
+            <a:srgbClr val="7E22CE"/>
+          </a:solidFill>
+          <a:ln w="12700">
+            <a:solidFill>
+              <a:srgbClr val="7E22CE"/>
+            </a:solidFill>
+            <a:prstDash val="solid"/>
+          </a:ln>
+        </p:spPr>
+      </p:sp>
+      <p:pic>
+        <p:nvPicPr>
+          <p:cNvPr id="18" name="Image 1" descr="preencoded.png">    </p:cNvPr>
+          <p:cNvPicPr>
+            <a:picLocks noChangeAspect="1"/>
+          </p:cNvPicPr>
+          <p:nvPr/>
+        </p:nvPicPr>
+        <p:blipFill>
+          <a:blip r:embed="rId2"/>
+          <a:stretch>
+            <a:fillRect/>
+          </a:stretch>
+        </p:blipFill>
+        <p:spPr>
+          <a:xfrm>
+            <a:off x="9818319" y="128016"/>
+            <a:ext cx="201168" cy="201168"/>
+          </a:xfrm>
+          <a:prstGeom prst="rect">
+            <a:avLst/>
+          </a:prstGeom>
+        </p:spPr>
+      </p:pic>
+      <p:sp>
+        <p:nvSpPr>
+          <p:cNvPr id="19" name="Text 15"/>
+          <p:cNvSpPr txBox="1"/>
+          <p:nvPr/>
+        </p:nvSpPr>
+        <p:spPr>
+          <a:xfrm>
+            <a:off x="10074351" y="91440"/>
+            <a:ext cx="1532128" cy="274320"/>
+          </a:xfrm>
+          <a:prstGeom prst="rect">
+            <a:avLst/>
+          </a:prstGeom>
+          <a:noFill/>
+          <a:ln/>
+        </p:spPr>
+        <p:txBody>
+          <a:bodyPr wrap="square" lIns="0" tIns="0" rIns="0" bIns="0" rtlCol="0" anchor="ctr"/>
+          <a:lstStyle/>
+          <a:p>
+            <a:pPr indent="0" marL="0">
+              <a:buNone/>
+            </a:pPr>
+            <a:r>
+              <a:rPr lang="en-US" sz="1100" b="1" dirty="0">
+                <a:solidFill>
+                  <a:srgbClr val="6B21A8"/>
+                </a:solidFill>
+                <a:latin typeface="Calibri" pitchFamily="34" charset="0"/>
+                <a:ea typeface="Calibri" pitchFamily="34" charset="-122"/>
+                <a:cs typeface="Calibri" pitchFamily="34" charset="-120"/>
+              </a:rPr>
+              <a:t>UNDERSTAND LATER</a:t>
+            </a:r>
+            <a:endParaRPr lang="en-US" sz="1100" dirty="0"/>
+          </a:p>
+        </p:txBody>
+      </p:sp>
+      <p:sp>
+        <p:nvSpPr>
+          <p:cNvPr id="20" name="Shape 16"/>
+          <p:cNvSpPr/>
+          <p:nvPr/>
+        </p:nvSpPr>
+        <p:spPr>
+          <a:xfrm>
+            <a:off x="8407349" y="91440"/>
+            <a:ext cx="1173226" cy="274320"/>
+          </a:xfrm>
+          <a:prstGeom prst="rect">
+            <a:avLst/>
+          </a:prstGeom>
+          <a:solidFill>
+            <a:srgbClr val="FEF3C7"/>
+          </a:solidFill>
+          <a:ln w="12700">
+            <a:solidFill>
+              <a:srgbClr val="B45309"/>
+            </a:solidFill>
+            <a:prstDash val="solid"/>
+          </a:ln>
+        </p:spPr>
+      </p:sp>
+      <p:sp>
+        <p:nvSpPr>
+          <p:cNvPr id="21" name="Shape 17"/>
+          <p:cNvSpPr/>
+          <p:nvPr/>
+        </p:nvSpPr>
+        <p:spPr>
+          <a:xfrm>
+            <a:off x="8407349" y="91440"/>
+            <a:ext cx="27432" cy="274320"/>
+          </a:xfrm>
+          <a:prstGeom prst="rect">
+            <a:avLst/>
+          </a:prstGeom>
+          <a:solidFill>
+            <a:srgbClr val="B45309"/>
+          </a:solidFill>
+          <a:ln w="12700">
+            <a:solidFill>
+              <a:srgbClr val="B45309"/>
+            </a:solidFill>
+            <a:prstDash val="solid"/>
+          </a:ln>
+        </p:spPr>
+      </p:sp>
+      <p:sp>
+        <p:nvSpPr>
+          <p:cNvPr id="22" name="Shape 18"/>
+          <p:cNvSpPr/>
+          <p:nvPr/>
+        </p:nvSpPr>
+        <p:spPr>
+          <a:xfrm>
+            <a:off x="8462213" y="91440"/>
+            <a:ext cx="27432" cy="274320"/>
+          </a:xfrm>
+          <a:prstGeom prst="rect">
+            <a:avLst/>
+          </a:prstGeom>
+          <a:solidFill>
+            <a:srgbClr val="B45309"/>
+          </a:solidFill>
+          <a:ln w="12700">
+            <a:solidFill>
+              <a:srgbClr val="B45309"/>
+            </a:solidFill>
+            <a:prstDash val="solid"/>
+          </a:ln>
+        </p:spPr>
+      </p:sp>
+      <p:pic>
+        <p:nvPicPr>
+          <p:cNvPr id="23" name="Image 2" descr="preencoded.png">    </p:cNvPr>
+          <p:cNvPicPr>
+            <a:picLocks noChangeAspect="1"/>
+          </p:cNvPicPr>
+          <p:nvPr/>
+        </p:nvPicPr>
+        <p:blipFill>
+          <a:blip r:embed="rId3"/>
+          <a:stretch>
+            <a:fillRect/>
+          </a:stretch>
+        </p:blipFill>
+        <p:spPr>
+          <a:xfrm>
+            <a:off x="8535365" y="128016"/>
+            <a:ext cx="201168" cy="201168"/>
+          </a:xfrm>
+          <a:prstGeom prst="rect">
+            <a:avLst/>
+          </a:prstGeom>
+        </p:spPr>
+      </p:pic>
+      <p:sp>
+        <p:nvSpPr>
+          <p:cNvPr id="24" name="Text 19"/>
+          <p:cNvSpPr txBox="1"/>
+          <p:nvPr/>
+        </p:nvSpPr>
+        <p:spPr>
+          <a:xfrm>
+            <a:off x="8791397" y="91440"/>
+            <a:ext cx="752602" cy="274320"/>
+          </a:xfrm>
+          <a:prstGeom prst="rect">
+            <a:avLst/>
+          </a:prstGeom>
+          <a:noFill/>
+          <a:ln/>
+        </p:spPr>
+        <p:txBody>
+          <a:bodyPr wrap="square" lIns="0" tIns="0" rIns="0" bIns="0" rtlCol="0" anchor="ctr"/>
+          <a:lstStyle/>
+          <a:p>
+            <a:pPr indent="0" marL="0">
+              <a:buNone/>
+            </a:pPr>
+            <a:r>
+              <a:rPr lang="en-US" sz="1100" b="1" dirty="0">
+                <a:solidFill>
+                  <a:srgbClr val="92400E"/>
+                </a:solidFill>
+                <a:latin typeface="Calibri" pitchFamily="34" charset="0"/>
+                <a:ea typeface="Calibri" pitchFamily="34" charset="-122"/>
+                <a:cs typeface="Calibri" pitchFamily="34" charset="-120"/>
+              </a:rPr>
+              <a:t>USE NOW</a:t>
+            </a:r>
+            <a:endParaRPr lang="en-US" sz="1100" dirty="0"/>
+          </a:p>
+        </p:txBody>
+      </p:sp>
+      <p:sp>
+        <p:nvSpPr>
+          <p:cNvPr id="25" name="Shape 20"/>
+          <p:cNvSpPr/>
+          <p:nvPr/>
+        </p:nvSpPr>
+        <p:spPr>
+          <a:xfrm>
+            <a:off x="6518097" y="91440"/>
+            <a:ext cx="1779524" cy="274320"/>
+          </a:xfrm>
+          <a:prstGeom prst="rect">
+            <a:avLst/>
+          </a:prstGeom>
+          <a:solidFill>
+            <a:srgbClr val="E0F2FE"/>
+          </a:solidFill>
+          <a:ln w="12700">
+            <a:solidFill>
+              <a:srgbClr val="0369A1"/>
+            </a:solidFill>
+            <a:prstDash val="solid"/>
+          </a:ln>
+        </p:spPr>
+      </p:sp>
+      <p:sp>
+        <p:nvSpPr>
+          <p:cNvPr id="26" name="Shape 21"/>
+          <p:cNvSpPr/>
+          <p:nvPr/>
+        </p:nvSpPr>
+        <p:spPr>
+          <a:xfrm>
+            <a:off x="6518097" y="91440"/>
+            <a:ext cx="73152" cy="274320"/>
+          </a:xfrm>
+          <a:prstGeom prst="rect">
+            <a:avLst/>
+          </a:prstGeom>
+          <a:solidFill>
+            <a:srgbClr val="0369A1"/>
+          </a:solidFill>
+          <a:ln w="12700">
+            <a:solidFill>
+              <a:srgbClr val="0369A1"/>
+            </a:solidFill>
+            <a:prstDash val="solid"/>
+          </a:ln>
+        </p:spPr>
+      </p:sp>
+      <p:pic>
+        <p:nvPicPr>
+          <p:cNvPr id="27" name="Image 3" descr="preencoded.png">    </p:cNvPr>
+          <p:cNvPicPr>
+            <a:picLocks noChangeAspect="1"/>
+          </p:cNvPicPr>
+          <p:nvPr/>
+        </p:nvPicPr>
+        <p:blipFill>
+          <a:blip r:embed="rId4"/>
+          <a:stretch>
+            <a:fillRect/>
+          </a:stretch>
+        </p:blipFill>
+        <p:spPr>
+          <a:xfrm>
+            <a:off x="6646113" y="128016"/>
+            <a:ext cx="201168" cy="201168"/>
+          </a:xfrm>
+          <a:prstGeom prst="rect">
+            <a:avLst/>
+          </a:prstGeom>
+        </p:spPr>
+      </p:pic>
+      <p:sp>
+        <p:nvSpPr>
+          <p:cNvPr id="28" name="Text 22"/>
+          <p:cNvSpPr txBox="1"/>
+          <p:nvPr/>
+        </p:nvSpPr>
+        <p:spPr>
+          <a:xfrm>
+            <a:off x="6902145" y="91440"/>
+            <a:ext cx="1358900" cy="274320"/>
+          </a:xfrm>
+          <a:prstGeom prst="rect">
+            <a:avLst/>
+          </a:prstGeom>
+          <a:noFill/>
+          <a:ln/>
+        </p:spPr>
+        <p:txBody>
+          <a:bodyPr wrap="square" lIns="0" tIns="0" rIns="0" bIns="0" rtlCol="0" anchor="ctr"/>
+          <a:lstStyle/>
+          <a:p>
+            <a:pPr indent="0" marL="0">
+              <a:buNone/>
+            </a:pPr>
+            <a:r>
+              <a:rPr lang="en-US" sz="1100" b="1" dirty="0">
+                <a:solidFill>
+                  <a:srgbClr val="075985"/>
+                </a:solidFill>
+                <a:latin typeface="Calibri" pitchFamily="34" charset="0"/>
+                <a:ea typeface="Calibri" pitchFamily="34" charset="-122"/>
+                <a:cs typeface="Calibri" pitchFamily="34" charset="-120"/>
+              </a:rPr>
+              <a:t>UNDERSTAND NOW</a:t>
+            </a:r>
+            <a:endParaRPr lang="en-US" sz="1100" dirty="0"/>
+          </a:p>
+        </p:txBody>
+      </p:sp>
+      <p:sp>
+        <p:nvSpPr>
           <p:cNvPr id="25" name="Slide Number Placeholder 0"/>
           <p:cNvSpPr>
             <a:spLocks noGrp="1"/>
@@ -3602,6 +4028,158 @@
       </p:sp>
       <p:sp>
         <p:nvSpPr>
+          <p:cNvPr id="17" name="Shape 15"/>
+          <p:cNvSpPr/>
+          <p:nvPr/>
+        </p:nvSpPr>
+        <p:spPr>
+          <a:xfrm>
+            <a:off x="9287967" y="91440"/>
+            <a:ext cx="2355088" cy="274320"/>
+          </a:xfrm>
+          <a:prstGeom prst="rect">
+            <a:avLst/>
+          </a:prstGeom>
+          <a:solidFill>
+            <a:srgbClr val="FEF3C7"/>
+          </a:solidFill>
+          <a:ln w="12700">
+            <a:solidFill>
+              <a:srgbClr val="B45309"/>
+            </a:solidFill>
+            <a:prstDash val="solid"/>
+          </a:ln>
+        </p:spPr>
+      </p:sp>
+      <p:sp>
+        <p:nvSpPr>
+          <p:cNvPr id="18" name="Shape 16"/>
+          <p:cNvSpPr/>
+          <p:nvPr/>
+        </p:nvSpPr>
+        <p:spPr>
+          <a:xfrm>
+            <a:off x="9287967" y="91440"/>
+            <a:ext cx="27432" cy="274320"/>
+          </a:xfrm>
+          <a:prstGeom prst="rect">
+            <a:avLst/>
+          </a:prstGeom>
+          <a:solidFill>
+            <a:srgbClr val="B45309"/>
+          </a:solidFill>
+          <a:ln w="12700">
+            <a:solidFill>
+              <a:srgbClr val="B45309"/>
+            </a:solidFill>
+            <a:prstDash val="solid"/>
+          </a:ln>
+        </p:spPr>
+      </p:sp>
+      <p:sp>
+        <p:nvSpPr>
+          <p:cNvPr id="19" name="Shape 17"/>
+          <p:cNvSpPr/>
+          <p:nvPr/>
+        </p:nvSpPr>
+        <p:spPr>
+          <a:xfrm>
+            <a:off x="9342831" y="91440"/>
+            <a:ext cx="27432" cy="274320"/>
+          </a:xfrm>
+          <a:prstGeom prst="rect">
+            <a:avLst/>
+          </a:prstGeom>
+          <a:solidFill>
+            <a:srgbClr val="B45309"/>
+          </a:solidFill>
+          <a:ln w="12700">
+            <a:solidFill>
+              <a:srgbClr val="B45309"/>
+            </a:solidFill>
+            <a:prstDash val="solid"/>
+          </a:ln>
+        </p:spPr>
+      </p:sp>
+      <p:pic>
+        <p:nvPicPr>
+          <p:cNvPr id="20" name="Image 0" descr="preencoded.png">    </p:cNvPr>
+          <p:cNvPicPr>
+            <a:picLocks noChangeAspect="1"/>
+          </p:cNvPicPr>
+          <p:nvPr/>
+        </p:nvPicPr>
+        <p:blipFill>
+          <a:blip r:embed="rId1"/>
+          <a:stretch>
+            <a:fillRect/>
+          </a:stretch>
+        </p:blipFill>
+        <p:spPr>
+          <a:xfrm>
+            <a:off x="9415983" y="128016"/>
+            <a:ext cx="201168" cy="201168"/>
+          </a:xfrm>
+          <a:prstGeom prst="rect">
+            <a:avLst/>
+          </a:prstGeom>
+        </p:spPr>
+      </p:pic>
+      <p:sp>
+        <p:nvSpPr>
+          <p:cNvPr id="21" name="Text 18"/>
+          <p:cNvSpPr txBox="1"/>
+          <p:nvPr/>
+        </p:nvSpPr>
+        <p:spPr>
+          <a:xfrm>
+            <a:off x="9672015" y="91440"/>
+            <a:ext cx="1934464" cy="274320"/>
+          </a:xfrm>
+          <a:prstGeom prst="rect">
+            <a:avLst/>
+          </a:prstGeom>
+          <a:noFill/>
+          <a:ln/>
+        </p:spPr>
+        <p:txBody>
+          <a:bodyPr wrap="square" lIns="0" tIns="0" rIns="0" bIns="0" rtlCol="0" anchor="ctr"/>
+          <a:lstStyle/>
+          <a:p>
+            <a:pPr indent="0" marL="0">
+              <a:buNone/>
+            </a:pPr>
+            <a:r>
+              <a:rPr lang="en-US" sz="1100" b="1" dirty="0">
+                <a:solidFill>
+                  <a:srgbClr val="92400E"/>
+                </a:solidFill>
+                <a:latin typeface="Calibri" pitchFamily="34" charset="0"/>
+                <a:ea typeface="Calibri" pitchFamily="34" charset="-122"/>
+                <a:cs typeface="Calibri" pitchFamily="34" charset="-120"/>
+              </a:rPr>
+              <a:t>USE NOW</a:t>
+            </a:r>
+            <a:pPr indent="0" marL="0">
+              <a:buNone/>
+            </a:pPr>
+            <a:r>
+              <a:rPr lang="en-US" sz="1100" dirty="0">
+                <a:solidFill>
+                  <a:srgbClr val="92400E"/>
+                </a:solidFill>
+                <a:latin typeface="Calibri" pitchFamily="34" charset="0"/>
+                <a:ea typeface="Calibri" pitchFamily="34" charset="-122"/>
+                <a:cs typeface="Calibri" pitchFamily="34" charset="-120"/>
+              </a:rPr>
+              <a:t> · the PRG32 tools</a:t>
+            </a:r>
+            <a:endParaRPr lang="en-US" sz="1100" dirty="0"/>
+          </a:p>
+        </p:txBody>
+      </p:sp>
+      <p:sp>
+        <p:nvSpPr>
           <p:cNvPr id="25" name="Slide Number Placeholder 0"/>
           <p:cNvSpPr>
             <a:spLocks noGrp="1"/>
@@ -4438,6 +5016,158 @@
       </p:sp>
       <p:sp>
         <p:nvSpPr>
+          <p:cNvPr id="17" name="Shape 15"/>
+          <p:cNvSpPr/>
+          <p:nvPr/>
+        </p:nvSpPr>
+        <p:spPr>
+          <a:xfrm>
+            <a:off x="9287967" y="91440"/>
+            <a:ext cx="2355088" cy="274320"/>
+          </a:xfrm>
+          <a:prstGeom prst="rect">
+            <a:avLst/>
+          </a:prstGeom>
+          <a:solidFill>
+            <a:srgbClr val="FEF3C7"/>
+          </a:solidFill>
+          <a:ln w="12700">
+            <a:solidFill>
+              <a:srgbClr val="B45309"/>
+            </a:solidFill>
+            <a:prstDash val="solid"/>
+          </a:ln>
+        </p:spPr>
+      </p:sp>
+      <p:sp>
+        <p:nvSpPr>
+          <p:cNvPr id="18" name="Shape 16"/>
+          <p:cNvSpPr/>
+          <p:nvPr/>
+        </p:nvSpPr>
+        <p:spPr>
+          <a:xfrm>
+            <a:off x="9287967" y="91440"/>
+            <a:ext cx="27432" cy="274320"/>
+          </a:xfrm>
+          <a:prstGeom prst="rect">
+            <a:avLst/>
+          </a:prstGeom>
+          <a:solidFill>
+            <a:srgbClr val="B45309"/>
+          </a:solidFill>
+          <a:ln w="12700">
+            <a:solidFill>
+              <a:srgbClr val="B45309"/>
+            </a:solidFill>
+            <a:prstDash val="solid"/>
+          </a:ln>
+        </p:spPr>
+      </p:sp>
+      <p:sp>
+        <p:nvSpPr>
+          <p:cNvPr id="19" name="Shape 17"/>
+          <p:cNvSpPr/>
+          <p:nvPr/>
+        </p:nvSpPr>
+        <p:spPr>
+          <a:xfrm>
+            <a:off x="9342831" y="91440"/>
+            <a:ext cx="27432" cy="274320"/>
+          </a:xfrm>
+          <a:prstGeom prst="rect">
+            <a:avLst/>
+          </a:prstGeom>
+          <a:solidFill>
+            <a:srgbClr val="B45309"/>
+          </a:solidFill>
+          <a:ln w="12700">
+            <a:solidFill>
+              <a:srgbClr val="B45309"/>
+            </a:solidFill>
+            <a:prstDash val="solid"/>
+          </a:ln>
+        </p:spPr>
+      </p:sp>
+      <p:pic>
+        <p:nvPicPr>
+          <p:cNvPr id="20" name="Image 0" descr="preencoded.png">    </p:cNvPr>
+          <p:cNvPicPr>
+            <a:picLocks noChangeAspect="1"/>
+          </p:cNvPicPr>
+          <p:nvPr/>
+        </p:nvPicPr>
+        <p:blipFill>
+          <a:blip r:embed="rId1"/>
+          <a:stretch>
+            <a:fillRect/>
+          </a:stretch>
+        </p:blipFill>
+        <p:spPr>
+          <a:xfrm>
+            <a:off x="9415983" y="128016"/>
+            <a:ext cx="201168" cy="201168"/>
+          </a:xfrm>
+          <a:prstGeom prst="rect">
+            <a:avLst/>
+          </a:prstGeom>
+        </p:spPr>
+      </p:pic>
+      <p:sp>
+        <p:nvSpPr>
+          <p:cNvPr id="21" name="Text 18"/>
+          <p:cNvSpPr txBox="1"/>
+          <p:nvPr/>
+        </p:nvSpPr>
+        <p:spPr>
+          <a:xfrm>
+            <a:off x="9672015" y="91440"/>
+            <a:ext cx="1934464" cy="274320"/>
+          </a:xfrm>
+          <a:prstGeom prst="rect">
+            <a:avLst/>
+          </a:prstGeom>
+          <a:noFill/>
+          <a:ln/>
+        </p:spPr>
+        <p:txBody>
+          <a:bodyPr wrap="square" lIns="0" tIns="0" rIns="0" bIns="0" rtlCol="0" anchor="ctr"/>
+          <a:lstStyle/>
+          <a:p>
+            <a:pPr indent="0" marL="0">
+              <a:buNone/>
+            </a:pPr>
+            <a:r>
+              <a:rPr lang="en-US" sz="1100" b="1" dirty="0">
+                <a:solidFill>
+                  <a:srgbClr val="92400E"/>
+                </a:solidFill>
+                <a:latin typeface="Calibri" pitchFamily="34" charset="0"/>
+                <a:ea typeface="Calibri" pitchFamily="34" charset="-122"/>
+                <a:cs typeface="Calibri" pitchFamily="34" charset="-120"/>
+              </a:rPr>
+              <a:t>USE NOW</a:t>
+            </a:r>
+            <a:pPr indent="0" marL="0">
+              <a:buNone/>
+            </a:pPr>
+            <a:r>
+              <a:rPr lang="en-US" sz="1100" dirty="0">
+                <a:solidFill>
+                  <a:srgbClr val="92400E"/>
+                </a:solidFill>
+                <a:latin typeface="Calibri" pitchFamily="34" charset="0"/>
+                <a:ea typeface="Calibri" pitchFamily="34" charset="-122"/>
+                <a:cs typeface="Calibri" pitchFamily="34" charset="-120"/>
+              </a:rPr>
+              <a:t> · the PRG32 tools</a:t>
+            </a:r>
+            <a:endParaRPr lang="en-US" sz="1100" dirty="0"/>
+          </a:p>
+        </p:txBody>
+      </p:sp>
+      <p:sp>
+        <p:nvSpPr>
           <p:cNvPr id="25" name="Slide Number Placeholder 0"/>
           <p:cNvSpPr>
             <a:spLocks noGrp="1"/>
@@ -5269,6 +5999,158 @@
               <a:t>A black screen: check the wiring of the display against the firmware</a:t>
             </a:r>
             <a:endParaRPr lang="en-US" sz="1200" dirty="0"/>
+          </a:p>
+        </p:txBody>
+      </p:sp>
+      <p:sp>
+        <p:nvSpPr>
+          <p:cNvPr id="17" name="Shape 15"/>
+          <p:cNvSpPr/>
+          <p:nvPr/>
+        </p:nvSpPr>
+        <p:spPr>
+          <a:xfrm>
+            <a:off x="9287967" y="91440"/>
+            <a:ext cx="2355088" cy="274320"/>
+          </a:xfrm>
+          <a:prstGeom prst="rect">
+            <a:avLst/>
+          </a:prstGeom>
+          <a:solidFill>
+            <a:srgbClr val="FEF3C7"/>
+          </a:solidFill>
+          <a:ln w="12700">
+            <a:solidFill>
+              <a:srgbClr val="B45309"/>
+            </a:solidFill>
+            <a:prstDash val="solid"/>
+          </a:ln>
+        </p:spPr>
+      </p:sp>
+      <p:sp>
+        <p:nvSpPr>
+          <p:cNvPr id="18" name="Shape 16"/>
+          <p:cNvSpPr/>
+          <p:nvPr/>
+        </p:nvSpPr>
+        <p:spPr>
+          <a:xfrm>
+            <a:off x="9287967" y="91440"/>
+            <a:ext cx="27432" cy="274320"/>
+          </a:xfrm>
+          <a:prstGeom prst="rect">
+            <a:avLst/>
+          </a:prstGeom>
+          <a:solidFill>
+            <a:srgbClr val="B45309"/>
+          </a:solidFill>
+          <a:ln w="12700">
+            <a:solidFill>
+              <a:srgbClr val="B45309"/>
+            </a:solidFill>
+            <a:prstDash val="solid"/>
+          </a:ln>
+        </p:spPr>
+      </p:sp>
+      <p:sp>
+        <p:nvSpPr>
+          <p:cNvPr id="19" name="Shape 17"/>
+          <p:cNvSpPr/>
+          <p:nvPr/>
+        </p:nvSpPr>
+        <p:spPr>
+          <a:xfrm>
+            <a:off x="9342831" y="91440"/>
+            <a:ext cx="27432" cy="274320"/>
+          </a:xfrm>
+          <a:prstGeom prst="rect">
+            <a:avLst/>
+          </a:prstGeom>
+          <a:solidFill>
+            <a:srgbClr val="B45309"/>
+          </a:solidFill>
+          <a:ln w="12700">
+            <a:solidFill>
+              <a:srgbClr val="B45309"/>
+            </a:solidFill>
+            <a:prstDash val="solid"/>
+          </a:ln>
+        </p:spPr>
+      </p:sp>
+      <p:pic>
+        <p:nvPicPr>
+          <p:cNvPr id="20" name="Image 0" descr="preencoded.png">    </p:cNvPr>
+          <p:cNvPicPr>
+            <a:picLocks noChangeAspect="1"/>
+          </p:cNvPicPr>
+          <p:nvPr/>
+        </p:nvPicPr>
+        <p:blipFill>
+          <a:blip r:embed="rId1"/>
+          <a:stretch>
+            <a:fillRect/>
+          </a:stretch>
+        </p:blipFill>
+        <p:spPr>
+          <a:xfrm>
+            <a:off x="9415983" y="128016"/>
+            <a:ext cx="201168" cy="201168"/>
+          </a:xfrm>
+          <a:prstGeom prst="rect">
+            <a:avLst/>
+          </a:prstGeom>
+        </p:spPr>
+      </p:pic>
+      <p:sp>
+        <p:nvSpPr>
+          <p:cNvPr id="21" name="Text 18"/>
+          <p:cNvSpPr txBox="1"/>
+          <p:nvPr/>
+        </p:nvSpPr>
+        <p:spPr>
+          <a:xfrm>
+            <a:off x="9672015" y="91440"/>
+            <a:ext cx="1934464" cy="274320"/>
+          </a:xfrm>
+          <a:prstGeom prst="rect">
+            <a:avLst/>
+          </a:prstGeom>
+          <a:noFill/>
+          <a:ln/>
+        </p:spPr>
+        <p:txBody>
+          <a:bodyPr wrap="square" lIns="0" tIns="0" rIns="0" bIns="0" rtlCol="0" anchor="ctr"/>
+          <a:lstStyle/>
+          <a:p>
+            <a:pPr indent="0" marL="0">
+              <a:buNone/>
+            </a:pPr>
+            <a:r>
+              <a:rPr lang="en-US" sz="1100" b="1" dirty="0">
+                <a:solidFill>
+                  <a:srgbClr val="92400E"/>
+                </a:solidFill>
+                <a:latin typeface="Calibri" pitchFamily="34" charset="0"/>
+                <a:ea typeface="Calibri" pitchFamily="34" charset="-122"/>
+                <a:cs typeface="Calibri" pitchFamily="34" charset="-120"/>
+              </a:rPr>
+              <a:t>USE NOW</a:t>
+            </a:r>
+            <a:pPr indent="0" marL="0">
+              <a:buNone/>
+            </a:pPr>
+            <a:r>
+              <a:rPr lang="en-US" sz="1100" dirty="0">
+                <a:solidFill>
+                  <a:srgbClr val="92400E"/>
+                </a:solidFill>
+                <a:latin typeface="Calibri" pitchFamily="34" charset="0"/>
+                <a:ea typeface="Calibri" pitchFamily="34" charset="-122"/>
+                <a:cs typeface="Calibri" pitchFamily="34" charset="-120"/>
+              </a:rPr>
+              <a:t> · the PRG32 tools</a:t>
+            </a:r>
+            <a:endParaRPr lang="en-US" sz="1100" dirty="0"/>
           </a:p>
         </p:txBody>
       </p:sp>
@@ -6655,6 +7537,158 @@
       </p:graphicFrame>
       <p:sp>
         <p:nvSpPr>
+          <p:cNvPr id="4" name="Shape 1"/>
+          <p:cNvSpPr/>
+          <p:nvPr/>
+        </p:nvSpPr>
+        <p:spPr>
+          <a:xfrm>
+            <a:off x="9287967" y="91440"/>
+            <a:ext cx="2355088" cy="274320"/>
+          </a:xfrm>
+          <a:prstGeom prst="rect">
+            <a:avLst/>
+          </a:prstGeom>
+          <a:solidFill>
+            <a:srgbClr val="FEF3C7"/>
+          </a:solidFill>
+          <a:ln w="12700">
+            <a:solidFill>
+              <a:srgbClr val="B45309"/>
+            </a:solidFill>
+            <a:prstDash val="solid"/>
+          </a:ln>
+        </p:spPr>
+      </p:sp>
+      <p:sp>
+        <p:nvSpPr>
+          <p:cNvPr id="5" name="Shape 2"/>
+          <p:cNvSpPr/>
+          <p:nvPr/>
+        </p:nvSpPr>
+        <p:spPr>
+          <a:xfrm>
+            <a:off x="9287967" y="91440"/>
+            <a:ext cx="27432" cy="274320"/>
+          </a:xfrm>
+          <a:prstGeom prst="rect">
+            <a:avLst/>
+          </a:prstGeom>
+          <a:solidFill>
+            <a:srgbClr val="B45309"/>
+          </a:solidFill>
+          <a:ln w="12700">
+            <a:solidFill>
+              <a:srgbClr val="B45309"/>
+            </a:solidFill>
+            <a:prstDash val="solid"/>
+          </a:ln>
+        </p:spPr>
+      </p:sp>
+      <p:sp>
+        <p:nvSpPr>
+          <p:cNvPr id="6" name="Shape 3"/>
+          <p:cNvSpPr/>
+          <p:nvPr/>
+        </p:nvSpPr>
+        <p:spPr>
+          <a:xfrm>
+            <a:off x="9342831" y="91440"/>
+            <a:ext cx="27432" cy="274320"/>
+          </a:xfrm>
+          <a:prstGeom prst="rect">
+            <a:avLst/>
+          </a:prstGeom>
+          <a:solidFill>
+            <a:srgbClr val="B45309"/>
+          </a:solidFill>
+          <a:ln w="12700">
+            <a:solidFill>
+              <a:srgbClr val="B45309"/>
+            </a:solidFill>
+            <a:prstDash val="solid"/>
+          </a:ln>
+        </p:spPr>
+      </p:sp>
+      <p:pic>
+        <p:nvPicPr>
+          <p:cNvPr id="7" name="Image 0" descr="preencoded.png">    </p:cNvPr>
+          <p:cNvPicPr>
+            <a:picLocks noChangeAspect="1"/>
+          </p:cNvPicPr>
+          <p:nvPr/>
+        </p:nvPicPr>
+        <p:blipFill>
+          <a:blip r:embed="rId1"/>
+          <a:stretch>
+            <a:fillRect/>
+          </a:stretch>
+        </p:blipFill>
+        <p:spPr>
+          <a:xfrm>
+            <a:off x="9415983" y="128016"/>
+            <a:ext cx="201168" cy="201168"/>
+          </a:xfrm>
+          <a:prstGeom prst="rect">
+            <a:avLst/>
+          </a:prstGeom>
+        </p:spPr>
+      </p:pic>
+      <p:sp>
+        <p:nvSpPr>
+          <p:cNvPr id="8" name="Text 4"/>
+          <p:cNvSpPr txBox="1"/>
+          <p:nvPr/>
+        </p:nvSpPr>
+        <p:spPr>
+          <a:xfrm>
+            <a:off x="9672015" y="91440"/>
+            <a:ext cx="1934464" cy="274320"/>
+          </a:xfrm>
+          <a:prstGeom prst="rect">
+            <a:avLst/>
+          </a:prstGeom>
+          <a:noFill/>
+          <a:ln/>
+        </p:spPr>
+        <p:txBody>
+          <a:bodyPr wrap="square" lIns="0" tIns="0" rIns="0" bIns="0" rtlCol="0" anchor="ctr"/>
+          <a:lstStyle/>
+          <a:p>
+            <a:pPr indent="0" marL="0">
+              <a:buNone/>
+            </a:pPr>
+            <a:r>
+              <a:rPr lang="en-US" sz="1100" b="1" dirty="0">
+                <a:solidFill>
+                  <a:srgbClr val="92400E"/>
+                </a:solidFill>
+                <a:latin typeface="Calibri" pitchFamily="34" charset="0"/>
+                <a:ea typeface="Calibri" pitchFamily="34" charset="-122"/>
+                <a:cs typeface="Calibri" pitchFamily="34" charset="-120"/>
+              </a:rPr>
+              <a:t>USE NOW</a:t>
+            </a:r>
+            <a:pPr indent="0" marL="0">
+              <a:buNone/>
+            </a:pPr>
+            <a:r>
+              <a:rPr lang="en-US" sz="1100" dirty="0">
+                <a:solidFill>
+                  <a:srgbClr val="92400E"/>
+                </a:solidFill>
+                <a:latin typeface="Calibri" pitchFamily="34" charset="0"/>
+                <a:ea typeface="Calibri" pitchFamily="34" charset="-122"/>
+                <a:cs typeface="Calibri" pitchFamily="34" charset="-120"/>
+              </a:rPr>
+              <a:t> · the PRG32 tools</a:t>
+            </a:r>
+            <a:endParaRPr lang="en-US" sz="1100" dirty="0"/>
+          </a:p>
+        </p:txBody>
+      </p:sp>
+      <p:sp>
+        <p:nvSpPr>
           <p:cNvPr id="25" name="Slide Number Placeholder 0"/>
           <p:cNvSpPr>
             <a:spLocks noGrp="1"/>
@@ -8761,6 +9795,133 @@
               <a:t>What is a volt, why is the released pin at 3.3 V, and who decides that 0 V is a bit?</a:t>
             </a:r>
             <a:endParaRPr lang="en-US" sz="1300" dirty="0"/>
+          </a:p>
+        </p:txBody>
+      </p:sp>
+      <p:sp>
+        <p:nvSpPr>
+          <p:cNvPr id="17" name="Shape 15"/>
+          <p:cNvSpPr/>
+          <p:nvPr/>
+        </p:nvSpPr>
+        <p:spPr>
+          <a:xfrm>
+            <a:off x="8747328" y="91440"/>
+            <a:ext cx="2895727" cy="274320"/>
+          </a:xfrm>
+          <a:prstGeom prst="rect">
+            <a:avLst/>
+          </a:prstGeom>
+          <a:solidFill>
+            <a:srgbClr val="E0F2FE"/>
+          </a:solidFill>
+          <a:ln w="12700">
+            <a:solidFill>
+              <a:srgbClr val="0369A1"/>
+            </a:solidFill>
+            <a:prstDash val="solid"/>
+          </a:ln>
+        </p:spPr>
+      </p:sp>
+      <p:sp>
+        <p:nvSpPr>
+          <p:cNvPr id="18" name="Shape 16"/>
+          <p:cNvSpPr/>
+          <p:nvPr/>
+        </p:nvSpPr>
+        <p:spPr>
+          <a:xfrm>
+            <a:off x="8747328" y="91440"/>
+            <a:ext cx="73152" cy="274320"/>
+          </a:xfrm>
+          <a:prstGeom prst="rect">
+            <a:avLst/>
+          </a:prstGeom>
+          <a:solidFill>
+            <a:srgbClr val="0369A1"/>
+          </a:solidFill>
+          <a:ln w="12700">
+            <a:solidFill>
+              <a:srgbClr val="0369A1"/>
+            </a:solidFill>
+            <a:prstDash val="solid"/>
+          </a:ln>
+        </p:spPr>
+      </p:sp>
+      <p:pic>
+        <p:nvPicPr>
+          <p:cNvPr id="19" name="Image 0" descr="preencoded.png">    </p:cNvPr>
+          <p:cNvPicPr>
+            <a:picLocks noChangeAspect="1"/>
+          </p:cNvPicPr>
+          <p:nvPr/>
+        </p:nvPicPr>
+        <p:blipFill>
+          <a:blip r:embed="rId1"/>
+          <a:stretch>
+            <a:fillRect/>
+          </a:stretch>
+        </p:blipFill>
+        <p:spPr>
+          <a:xfrm>
+            <a:off x="8875344" y="128016"/>
+            <a:ext cx="201168" cy="201168"/>
+          </a:xfrm>
+          <a:prstGeom prst="rect">
+            <a:avLst/>
+          </a:prstGeom>
+        </p:spPr>
+      </p:pic>
+      <p:sp>
+        <p:nvSpPr>
+          <p:cNvPr id="20" name="Text 17"/>
+          <p:cNvSpPr txBox="1"/>
+          <p:nvPr/>
+        </p:nvSpPr>
+        <p:spPr>
+          <a:xfrm>
+            <a:off x="9131376" y="91440"/>
+            <a:ext cx="2475103" cy="274320"/>
+          </a:xfrm>
+          <a:prstGeom prst="rect">
+            <a:avLst/>
+          </a:prstGeom>
+          <a:noFill/>
+          <a:ln/>
+        </p:spPr>
+        <p:txBody>
+          <a:bodyPr wrap="square" lIns="0" tIns="0" rIns="0" bIns="0" rtlCol="0" anchor="ctr"/>
+          <a:lstStyle/>
+          <a:p>
+            <a:pPr indent="0" marL="0">
+              <a:buNone/>
+            </a:pPr>
+            <a:r>
+              <a:rPr lang="en-US" sz="1100" b="1" dirty="0">
+                <a:solidFill>
+                  <a:srgbClr val="075985"/>
+                </a:solidFill>
+                <a:latin typeface="Calibri" pitchFamily="34" charset="0"/>
+                <a:ea typeface="Calibri" pitchFamily="34" charset="-122"/>
+                <a:cs typeface="Calibri" pitchFamily="34" charset="-120"/>
+              </a:rPr>
+              <a:t>UNDERSTAND NOW</a:t>
+            </a:r>
+            <a:pPr indent="0" marL="0">
+              <a:buNone/>
+            </a:pPr>
+            <a:r>
+              <a:rPr lang="en-US" sz="1100" dirty="0">
+                <a:solidFill>
+                  <a:srgbClr val="075985"/>
+                </a:solidFill>
+                <a:latin typeface="Calibri" pitchFamily="34" charset="0"/>
+                <a:ea typeface="Calibri" pitchFamily="34" charset="-122"/>
+                <a:cs typeface="Calibri" pitchFamily="34" charset="-120"/>
+              </a:rPr>
+              <a:t> · pull-up inputs</a:t>
+            </a:r>
+            <a:endParaRPr lang="en-US" sz="1100" dirty="0"/>
           </a:p>
         </p:txBody>
       </p:sp>
@@ -10559,6 +11720,133 @@
       </p:graphicFrame>
       <p:sp>
         <p:nvSpPr>
+          <p:cNvPr id="4" name="Shape 1"/>
+          <p:cNvSpPr/>
+          <p:nvPr/>
+        </p:nvSpPr>
+        <p:spPr>
+          <a:xfrm>
+            <a:off x="8747328" y="91440"/>
+            <a:ext cx="2895727" cy="274320"/>
+          </a:xfrm>
+          <a:prstGeom prst="rect">
+            <a:avLst/>
+          </a:prstGeom>
+          <a:solidFill>
+            <a:srgbClr val="E0F2FE"/>
+          </a:solidFill>
+          <a:ln w="12700">
+            <a:solidFill>
+              <a:srgbClr val="0369A1"/>
+            </a:solidFill>
+            <a:prstDash val="solid"/>
+          </a:ln>
+        </p:spPr>
+      </p:sp>
+      <p:sp>
+        <p:nvSpPr>
+          <p:cNvPr id="5" name="Shape 2"/>
+          <p:cNvSpPr/>
+          <p:nvPr/>
+        </p:nvSpPr>
+        <p:spPr>
+          <a:xfrm>
+            <a:off x="8747328" y="91440"/>
+            <a:ext cx="73152" cy="274320"/>
+          </a:xfrm>
+          <a:prstGeom prst="rect">
+            <a:avLst/>
+          </a:prstGeom>
+          <a:solidFill>
+            <a:srgbClr val="0369A1"/>
+          </a:solidFill>
+          <a:ln w="12700">
+            <a:solidFill>
+              <a:srgbClr val="0369A1"/>
+            </a:solidFill>
+            <a:prstDash val="solid"/>
+          </a:ln>
+        </p:spPr>
+      </p:sp>
+      <p:pic>
+        <p:nvPicPr>
+          <p:cNvPr id="6" name="Image 0" descr="preencoded.png">    </p:cNvPr>
+          <p:cNvPicPr>
+            <a:picLocks noChangeAspect="1"/>
+          </p:cNvPicPr>
+          <p:nvPr/>
+        </p:nvPicPr>
+        <p:blipFill>
+          <a:blip r:embed="rId1"/>
+          <a:stretch>
+            <a:fillRect/>
+          </a:stretch>
+        </p:blipFill>
+        <p:spPr>
+          <a:xfrm>
+            <a:off x="8875344" y="128016"/>
+            <a:ext cx="201168" cy="201168"/>
+          </a:xfrm>
+          <a:prstGeom prst="rect">
+            <a:avLst/>
+          </a:prstGeom>
+        </p:spPr>
+      </p:pic>
+      <p:sp>
+        <p:nvSpPr>
+          <p:cNvPr id="7" name="Text 3"/>
+          <p:cNvSpPr txBox="1"/>
+          <p:nvPr/>
+        </p:nvSpPr>
+        <p:spPr>
+          <a:xfrm>
+            <a:off x="9131376" y="91440"/>
+            <a:ext cx="2475103" cy="274320"/>
+          </a:xfrm>
+          <a:prstGeom prst="rect">
+            <a:avLst/>
+          </a:prstGeom>
+          <a:noFill/>
+          <a:ln/>
+        </p:spPr>
+        <p:txBody>
+          <a:bodyPr wrap="square" lIns="0" tIns="0" rIns="0" bIns="0" rtlCol="0" anchor="ctr"/>
+          <a:lstStyle/>
+          <a:p>
+            <a:pPr indent="0" marL="0">
+              <a:buNone/>
+            </a:pPr>
+            <a:r>
+              <a:rPr lang="en-US" sz="1100" b="1" dirty="0">
+                <a:solidFill>
+                  <a:srgbClr val="075985"/>
+                </a:solidFill>
+                <a:latin typeface="Calibri" pitchFamily="34" charset="0"/>
+                <a:ea typeface="Calibri" pitchFamily="34" charset="-122"/>
+                <a:cs typeface="Calibri" pitchFamily="34" charset="-120"/>
+              </a:rPr>
+              <a:t>UNDERSTAND NOW</a:t>
+            </a:r>
+            <a:pPr indent="0" marL="0">
+              <a:buNone/>
+            </a:pPr>
+            <a:r>
+              <a:rPr lang="en-US" sz="1100" dirty="0">
+                <a:solidFill>
+                  <a:srgbClr val="075985"/>
+                </a:solidFill>
+                <a:latin typeface="Calibri" pitchFamily="34" charset="0"/>
+                <a:ea typeface="Calibri" pitchFamily="34" charset="-122"/>
+                <a:cs typeface="Calibri" pitchFamily="34" charset="-120"/>
+              </a:rPr>
+              <a:t> · pull-up inputs</a:t>
+            </a:r>
+            <a:endParaRPr lang="en-US" sz="1100" dirty="0"/>
+          </a:p>
+        </p:txBody>
+      </p:sp>
+      <p:sp>
+        <p:nvSpPr>
           <p:cNvPr id="25" name="Slide Number Placeholder 0"/>
           <p:cNvSpPr>
             <a:spLocks noGrp="1"/>
@@ -11071,6 +12359,133 @@
       </p:sp>
       <p:sp>
         <p:nvSpPr>
+          <p:cNvPr id="15" name="Shape 12"/>
+          <p:cNvSpPr/>
+          <p:nvPr/>
+        </p:nvSpPr>
+        <p:spPr>
+          <a:xfrm>
+            <a:off x="8747328" y="91440"/>
+            <a:ext cx="2895727" cy="274320"/>
+          </a:xfrm>
+          <a:prstGeom prst="rect">
+            <a:avLst/>
+          </a:prstGeom>
+          <a:solidFill>
+            <a:srgbClr val="E0F2FE"/>
+          </a:solidFill>
+          <a:ln w="12700">
+            <a:solidFill>
+              <a:srgbClr val="0369A1"/>
+            </a:solidFill>
+            <a:prstDash val="solid"/>
+          </a:ln>
+        </p:spPr>
+      </p:sp>
+      <p:sp>
+        <p:nvSpPr>
+          <p:cNvPr id="16" name="Shape 13"/>
+          <p:cNvSpPr/>
+          <p:nvPr/>
+        </p:nvSpPr>
+        <p:spPr>
+          <a:xfrm>
+            <a:off x="8747328" y="91440"/>
+            <a:ext cx="73152" cy="274320"/>
+          </a:xfrm>
+          <a:prstGeom prst="rect">
+            <a:avLst/>
+          </a:prstGeom>
+          <a:solidFill>
+            <a:srgbClr val="0369A1"/>
+          </a:solidFill>
+          <a:ln w="12700">
+            <a:solidFill>
+              <a:srgbClr val="0369A1"/>
+            </a:solidFill>
+            <a:prstDash val="solid"/>
+          </a:ln>
+        </p:spPr>
+      </p:sp>
+      <p:pic>
+        <p:nvPicPr>
+          <p:cNvPr id="17" name="Image 1" descr="preencoded.png">    </p:cNvPr>
+          <p:cNvPicPr>
+            <a:picLocks noChangeAspect="1"/>
+          </p:cNvPicPr>
+          <p:nvPr/>
+        </p:nvPicPr>
+        <p:blipFill>
+          <a:blip r:embed="rId2"/>
+          <a:stretch>
+            <a:fillRect/>
+          </a:stretch>
+        </p:blipFill>
+        <p:spPr>
+          <a:xfrm>
+            <a:off x="8875344" y="128016"/>
+            <a:ext cx="201168" cy="201168"/>
+          </a:xfrm>
+          <a:prstGeom prst="rect">
+            <a:avLst/>
+          </a:prstGeom>
+        </p:spPr>
+      </p:pic>
+      <p:sp>
+        <p:nvSpPr>
+          <p:cNvPr id="18" name="Text 14"/>
+          <p:cNvSpPr txBox="1"/>
+          <p:nvPr/>
+        </p:nvSpPr>
+        <p:spPr>
+          <a:xfrm>
+            <a:off x="9131376" y="91440"/>
+            <a:ext cx="2475103" cy="274320"/>
+          </a:xfrm>
+          <a:prstGeom prst="rect">
+            <a:avLst/>
+          </a:prstGeom>
+          <a:noFill/>
+          <a:ln/>
+        </p:spPr>
+        <p:txBody>
+          <a:bodyPr wrap="square" lIns="0" tIns="0" rIns="0" bIns="0" rtlCol="0" anchor="ctr"/>
+          <a:lstStyle/>
+          <a:p>
+            <a:pPr indent="0" marL="0">
+              <a:buNone/>
+            </a:pPr>
+            <a:r>
+              <a:rPr lang="en-US" sz="1100" b="1" dirty="0">
+                <a:solidFill>
+                  <a:srgbClr val="075985"/>
+                </a:solidFill>
+                <a:latin typeface="Calibri" pitchFamily="34" charset="0"/>
+                <a:ea typeface="Calibri" pitchFamily="34" charset="-122"/>
+                <a:cs typeface="Calibri" pitchFamily="34" charset="-120"/>
+              </a:rPr>
+              <a:t>UNDERSTAND NOW</a:t>
+            </a:r>
+            <a:pPr indent="0" marL="0">
+              <a:buNone/>
+            </a:pPr>
+            <a:r>
+              <a:rPr lang="en-US" sz="1100" dirty="0">
+                <a:solidFill>
+                  <a:srgbClr val="075985"/>
+                </a:solidFill>
+                <a:latin typeface="Calibri" pitchFamily="34" charset="0"/>
+                <a:ea typeface="Calibri" pitchFamily="34" charset="-122"/>
+                <a:cs typeface="Calibri" pitchFamily="34" charset="-120"/>
+              </a:rPr>
+              <a:t> · pull-up inputs</a:t>
+            </a:r>
+            <a:endParaRPr lang="en-US" sz="1100" dirty="0"/>
+          </a:p>
+        </p:txBody>
+      </p:sp>
+      <p:sp>
+        <p:nvSpPr>
           <p:cNvPr id="25" name="Slide Number Placeholder 0"/>
           <p:cNvSpPr>
             <a:spLocks noGrp="1"/>
@@ -11574,6 +12989,158 @@
       </p:sp>
       <p:sp>
         <p:nvSpPr>
+          <p:cNvPr id="5" name="Shape 3"/>
+          <p:cNvSpPr/>
+          <p:nvPr/>
+        </p:nvSpPr>
+        <p:spPr>
+          <a:xfrm>
+            <a:off x="8959672" y="91440"/>
+            <a:ext cx="2683383" cy="274320"/>
+          </a:xfrm>
+          <a:prstGeom prst="rect">
+            <a:avLst/>
+          </a:prstGeom>
+          <a:solidFill>
+            <a:srgbClr val="FEF3C7"/>
+          </a:solidFill>
+          <a:ln w="12700">
+            <a:solidFill>
+              <a:srgbClr val="B45309"/>
+            </a:solidFill>
+            <a:prstDash val="solid"/>
+          </a:ln>
+        </p:spPr>
+      </p:sp>
+      <p:sp>
+        <p:nvSpPr>
+          <p:cNvPr id="6" name="Shape 4"/>
+          <p:cNvSpPr/>
+          <p:nvPr/>
+        </p:nvSpPr>
+        <p:spPr>
+          <a:xfrm>
+            <a:off x="8959672" y="91440"/>
+            <a:ext cx="27432" cy="274320"/>
+          </a:xfrm>
+          <a:prstGeom prst="rect">
+            <a:avLst/>
+          </a:prstGeom>
+          <a:solidFill>
+            <a:srgbClr val="B45309"/>
+          </a:solidFill>
+          <a:ln w="12700">
+            <a:solidFill>
+              <a:srgbClr val="B45309"/>
+            </a:solidFill>
+            <a:prstDash val="solid"/>
+          </a:ln>
+        </p:spPr>
+      </p:sp>
+      <p:sp>
+        <p:nvSpPr>
+          <p:cNvPr id="7" name="Shape 5"/>
+          <p:cNvSpPr/>
+          <p:nvPr/>
+        </p:nvSpPr>
+        <p:spPr>
+          <a:xfrm>
+            <a:off x="9014536" y="91440"/>
+            <a:ext cx="27432" cy="274320"/>
+          </a:xfrm>
+          <a:prstGeom prst="rect">
+            <a:avLst/>
+          </a:prstGeom>
+          <a:solidFill>
+            <a:srgbClr val="B45309"/>
+          </a:solidFill>
+          <a:ln w="12700">
+            <a:solidFill>
+              <a:srgbClr val="B45309"/>
+            </a:solidFill>
+            <a:prstDash val="solid"/>
+          </a:ln>
+        </p:spPr>
+      </p:sp>
+      <p:pic>
+        <p:nvPicPr>
+          <p:cNvPr id="8" name="Image 0" descr="preencoded.png">    </p:cNvPr>
+          <p:cNvPicPr>
+            <a:picLocks noChangeAspect="1"/>
+          </p:cNvPicPr>
+          <p:nvPr/>
+        </p:nvPicPr>
+        <p:blipFill>
+          <a:blip r:embed="rId1"/>
+          <a:stretch>
+            <a:fillRect/>
+          </a:stretch>
+        </p:blipFill>
+        <p:spPr>
+          <a:xfrm>
+            <a:off x="9087688" y="128016"/>
+            <a:ext cx="201168" cy="201168"/>
+          </a:xfrm>
+          <a:prstGeom prst="rect">
+            <a:avLst/>
+          </a:prstGeom>
+        </p:spPr>
+      </p:pic>
+      <p:sp>
+        <p:nvSpPr>
+          <p:cNvPr id="9" name="Text 6"/>
+          <p:cNvSpPr txBox="1"/>
+          <p:nvPr/>
+        </p:nvSpPr>
+        <p:spPr>
+          <a:xfrm>
+            <a:off x="9343720" y="91440"/>
+            <a:ext cx="2262759" cy="274320"/>
+          </a:xfrm>
+          <a:prstGeom prst="rect">
+            <a:avLst/>
+          </a:prstGeom>
+          <a:noFill/>
+          <a:ln/>
+        </p:spPr>
+        <p:txBody>
+          <a:bodyPr wrap="square" lIns="0" tIns="0" rIns="0" bIns="0" rtlCol="0" anchor="ctr"/>
+          <a:lstStyle/>
+          <a:p>
+            <a:pPr indent="0" marL="0">
+              <a:buNone/>
+            </a:pPr>
+            <a:r>
+              <a:rPr lang="en-US" sz="1100" b="1" dirty="0">
+                <a:solidFill>
+                  <a:srgbClr val="92400E"/>
+                </a:solidFill>
+                <a:latin typeface="Calibri" pitchFamily="34" charset="0"/>
+                <a:ea typeface="Calibri" pitchFamily="34" charset="-122"/>
+                <a:cs typeface="Calibri" pitchFamily="34" charset="-120"/>
+              </a:rPr>
+              <a:t>USE NOW</a:t>
+            </a:r>
+            <a:pPr indent="0" marL="0">
+              <a:buNone/>
+            </a:pPr>
+            <a:r>
+              <a:rPr lang="en-US" sz="1100" dirty="0">
+                <a:solidFill>
+                  <a:srgbClr val="92400E"/>
+                </a:solidFill>
+                <a:latin typeface="Calibri" pitchFamily="34" charset="0"/>
+                <a:ea typeface="Calibri" pitchFamily="34" charset="-122"/>
+                <a:cs typeface="Calibri" pitchFamily="34" charset="-120"/>
+              </a:rPr>
+              <a:t> · the complete program</a:t>
+            </a:r>
+            <a:endParaRPr lang="en-US" sz="1100" dirty="0"/>
+          </a:p>
+        </p:txBody>
+      </p:sp>
+      <p:sp>
+        <p:nvSpPr>
           <p:cNvPr id="25" name="Slide Number Placeholder 0"/>
           <p:cNvSpPr>
             <a:spLocks noGrp="1"/>
@@ -12034,6 +13601,158 @@
       </p:sp>
       <p:sp>
         <p:nvSpPr>
+          <p:cNvPr id="5" name="Shape 3"/>
+          <p:cNvSpPr/>
+          <p:nvPr/>
+        </p:nvSpPr>
+        <p:spPr>
+          <a:xfrm>
+            <a:off x="8959672" y="91440"/>
+            <a:ext cx="2683383" cy="274320"/>
+          </a:xfrm>
+          <a:prstGeom prst="rect">
+            <a:avLst/>
+          </a:prstGeom>
+          <a:solidFill>
+            <a:srgbClr val="FEF3C7"/>
+          </a:solidFill>
+          <a:ln w="12700">
+            <a:solidFill>
+              <a:srgbClr val="B45309"/>
+            </a:solidFill>
+            <a:prstDash val="solid"/>
+          </a:ln>
+        </p:spPr>
+      </p:sp>
+      <p:sp>
+        <p:nvSpPr>
+          <p:cNvPr id="6" name="Shape 4"/>
+          <p:cNvSpPr/>
+          <p:nvPr/>
+        </p:nvSpPr>
+        <p:spPr>
+          <a:xfrm>
+            <a:off x="8959672" y="91440"/>
+            <a:ext cx="27432" cy="274320"/>
+          </a:xfrm>
+          <a:prstGeom prst="rect">
+            <a:avLst/>
+          </a:prstGeom>
+          <a:solidFill>
+            <a:srgbClr val="B45309"/>
+          </a:solidFill>
+          <a:ln w="12700">
+            <a:solidFill>
+              <a:srgbClr val="B45309"/>
+            </a:solidFill>
+            <a:prstDash val="solid"/>
+          </a:ln>
+        </p:spPr>
+      </p:sp>
+      <p:sp>
+        <p:nvSpPr>
+          <p:cNvPr id="7" name="Shape 5"/>
+          <p:cNvSpPr/>
+          <p:nvPr/>
+        </p:nvSpPr>
+        <p:spPr>
+          <a:xfrm>
+            <a:off x="9014536" y="91440"/>
+            <a:ext cx="27432" cy="274320"/>
+          </a:xfrm>
+          <a:prstGeom prst="rect">
+            <a:avLst/>
+          </a:prstGeom>
+          <a:solidFill>
+            <a:srgbClr val="B45309"/>
+          </a:solidFill>
+          <a:ln w="12700">
+            <a:solidFill>
+              <a:srgbClr val="B45309"/>
+            </a:solidFill>
+            <a:prstDash val="solid"/>
+          </a:ln>
+        </p:spPr>
+      </p:sp>
+      <p:pic>
+        <p:nvPicPr>
+          <p:cNvPr id="8" name="Image 0" descr="preencoded.png">    </p:cNvPr>
+          <p:cNvPicPr>
+            <a:picLocks noChangeAspect="1"/>
+          </p:cNvPicPr>
+          <p:nvPr/>
+        </p:nvPicPr>
+        <p:blipFill>
+          <a:blip r:embed="rId1"/>
+          <a:stretch>
+            <a:fillRect/>
+          </a:stretch>
+        </p:blipFill>
+        <p:spPr>
+          <a:xfrm>
+            <a:off x="9087688" y="128016"/>
+            <a:ext cx="201168" cy="201168"/>
+          </a:xfrm>
+          <a:prstGeom prst="rect">
+            <a:avLst/>
+          </a:prstGeom>
+        </p:spPr>
+      </p:pic>
+      <p:sp>
+        <p:nvSpPr>
+          <p:cNvPr id="9" name="Text 6"/>
+          <p:cNvSpPr txBox="1"/>
+          <p:nvPr/>
+        </p:nvSpPr>
+        <p:spPr>
+          <a:xfrm>
+            <a:off x="9343720" y="91440"/>
+            <a:ext cx="2262759" cy="274320"/>
+          </a:xfrm>
+          <a:prstGeom prst="rect">
+            <a:avLst/>
+          </a:prstGeom>
+          <a:noFill/>
+          <a:ln/>
+        </p:spPr>
+        <p:txBody>
+          <a:bodyPr wrap="square" lIns="0" tIns="0" rIns="0" bIns="0" rtlCol="0" anchor="ctr"/>
+          <a:lstStyle/>
+          <a:p>
+            <a:pPr indent="0" marL="0">
+              <a:buNone/>
+            </a:pPr>
+            <a:r>
+              <a:rPr lang="en-US" sz="1100" b="1" dirty="0">
+                <a:solidFill>
+                  <a:srgbClr val="92400E"/>
+                </a:solidFill>
+                <a:latin typeface="Calibri" pitchFamily="34" charset="0"/>
+                <a:ea typeface="Calibri" pitchFamily="34" charset="-122"/>
+                <a:cs typeface="Calibri" pitchFamily="34" charset="-120"/>
+              </a:rPr>
+              <a:t>USE NOW</a:t>
+            </a:r>
+            <a:pPr indent="0" marL="0">
+              <a:buNone/>
+            </a:pPr>
+            <a:r>
+              <a:rPr lang="en-US" sz="1100" dirty="0">
+                <a:solidFill>
+                  <a:srgbClr val="92400E"/>
+                </a:solidFill>
+                <a:latin typeface="Calibri" pitchFamily="34" charset="0"/>
+                <a:ea typeface="Calibri" pitchFamily="34" charset="-122"/>
+                <a:cs typeface="Calibri" pitchFamily="34" charset="-120"/>
+              </a:rPr>
+              <a:t> · the complete program</a:t>
+            </a:r>
+            <a:endParaRPr lang="en-US" sz="1100" dirty="0"/>
+          </a:p>
+        </p:txBody>
+      </p:sp>
+      <p:sp>
+        <p:nvSpPr>
           <p:cNvPr id="25" name="Slide Number Placeholder 0"/>
           <p:cNvSpPr>
             <a:spLocks noGrp="1"/>
@@ -12549,6 +14268,158 @@
               <a:t>pressed: .word 0</a:t>
             </a:r>
             <a:endParaRPr lang="en-US" sz="1350" dirty="0"/>
+          </a:p>
+        </p:txBody>
+      </p:sp>
+      <p:sp>
+        <p:nvSpPr>
+          <p:cNvPr id="5" name="Shape 3"/>
+          <p:cNvSpPr/>
+          <p:nvPr/>
+        </p:nvSpPr>
+        <p:spPr>
+          <a:xfrm>
+            <a:off x="8959672" y="91440"/>
+            <a:ext cx="2683383" cy="274320"/>
+          </a:xfrm>
+          <a:prstGeom prst="rect">
+            <a:avLst/>
+          </a:prstGeom>
+          <a:solidFill>
+            <a:srgbClr val="FEF3C7"/>
+          </a:solidFill>
+          <a:ln w="12700">
+            <a:solidFill>
+              <a:srgbClr val="B45309"/>
+            </a:solidFill>
+            <a:prstDash val="solid"/>
+          </a:ln>
+        </p:spPr>
+      </p:sp>
+      <p:sp>
+        <p:nvSpPr>
+          <p:cNvPr id="6" name="Shape 4"/>
+          <p:cNvSpPr/>
+          <p:nvPr/>
+        </p:nvSpPr>
+        <p:spPr>
+          <a:xfrm>
+            <a:off x="8959672" y="91440"/>
+            <a:ext cx="27432" cy="274320"/>
+          </a:xfrm>
+          <a:prstGeom prst="rect">
+            <a:avLst/>
+          </a:prstGeom>
+          <a:solidFill>
+            <a:srgbClr val="B45309"/>
+          </a:solidFill>
+          <a:ln w="12700">
+            <a:solidFill>
+              <a:srgbClr val="B45309"/>
+            </a:solidFill>
+            <a:prstDash val="solid"/>
+          </a:ln>
+        </p:spPr>
+      </p:sp>
+      <p:sp>
+        <p:nvSpPr>
+          <p:cNvPr id="7" name="Shape 5"/>
+          <p:cNvSpPr/>
+          <p:nvPr/>
+        </p:nvSpPr>
+        <p:spPr>
+          <a:xfrm>
+            <a:off x="9014536" y="91440"/>
+            <a:ext cx="27432" cy="274320"/>
+          </a:xfrm>
+          <a:prstGeom prst="rect">
+            <a:avLst/>
+          </a:prstGeom>
+          <a:solidFill>
+            <a:srgbClr val="B45309"/>
+          </a:solidFill>
+          <a:ln w="12700">
+            <a:solidFill>
+              <a:srgbClr val="B45309"/>
+            </a:solidFill>
+            <a:prstDash val="solid"/>
+          </a:ln>
+        </p:spPr>
+      </p:sp>
+      <p:pic>
+        <p:nvPicPr>
+          <p:cNvPr id="8" name="Image 0" descr="preencoded.png">    </p:cNvPr>
+          <p:cNvPicPr>
+            <a:picLocks noChangeAspect="1"/>
+          </p:cNvPicPr>
+          <p:nvPr/>
+        </p:nvPicPr>
+        <p:blipFill>
+          <a:blip r:embed="rId1"/>
+          <a:stretch>
+            <a:fillRect/>
+          </a:stretch>
+        </p:blipFill>
+        <p:spPr>
+          <a:xfrm>
+            <a:off x="9087688" y="128016"/>
+            <a:ext cx="201168" cy="201168"/>
+          </a:xfrm>
+          <a:prstGeom prst="rect">
+            <a:avLst/>
+          </a:prstGeom>
+        </p:spPr>
+      </p:pic>
+      <p:sp>
+        <p:nvSpPr>
+          <p:cNvPr id="9" name="Text 6"/>
+          <p:cNvSpPr txBox="1"/>
+          <p:nvPr/>
+        </p:nvSpPr>
+        <p:spPr>
+          <a:xfrm>
+            <a:off x="9343720" y="91440"/>
+            <a:ext cx="2262759" cy="274320"/>
+          </a:xfrm>
+          <a:prstGeom prst="rect">
+            <a:avLst/>
+          </a:prstGeom>
+          <a:noFill/>
+          <a:ln/>
+        </p:spPr>
+        <p:txBody>
+          <a:bodyPr wrap="square" lIns="0" tIns="0" rIns="0" bIns="0" rtlCol="0" anchor="ctr"/>
+          <a:lstStyle/>
+          <a:p>
+            <a:pPr indent="0" marL="0">
+              <a:buNone/>
+            </a:pPr>
+            <a:r>
+              <a:rPr lang="en-US" sz="1100" b="1" dirty="0">
+                <a:solidFill>
+                  <a:srgbClr val="92400E"/>
+                </a:solidFill>
+                <a:latin typeface="Calibri" pitchFamily="34" charset="0"/>
+                <a:ea typeface="Calibri" pitchFamily="34" charset="-122"/>
+                <a:cs typeface="Calibri" pitchFamily="34" charset="-120"/>
+              </a:rPr>
+              <a:t>USE NOW</a:t>
+            </a:r>
+            <a:pPr indent="0" marL="0">
+              <a:buNone/>
+            </a:pPr>
+            <a:r>
+              <a:rPr lang="en-US" sz="1100" dirty="0">
+                <a:solidFill>
+                  <a:srgbClr val="92400E"/>
+                </a:solidFill>
+                <a:latin typeface="Calibri" pitchFamily="34" charset="0"/>
+                <a:ea typeface="Calibri" pitchFamily="34" charset="-122"/>
+                <a:cs typeface="Calibri" pitchFamily="34" charset="-120"/>
+              </a:rPr>
+              <a:t> · the complete program</a:t>
+            </a:r>
+            <a:endParaRPr lang="en-US" sz="1100" dirty="0"/>
           </a:p>
         </p:txBody>
       </p:sp>

--- a/en/slides/10-Computer_Architecture-Electronics-Code.pptx
+++ b/en/slides/10-Computer_Architecture-Electronics-Code.pptx
@@ -120,31 +120,31 @@
   <p:extLst>
     <p:ext uri="{521415D9-36F7-43E2-AB2F-B90AF26B5E84}">
       <p14:sectionLst xmlns:p14="http://schemas.microsoft.com/office/powerpoint/2010/main">
-        <p14:section name="Opening" id="{e6b1a8b7-2b79-97d2-a80d-af50a3267310}">
+        <p14:section name="Opening" id="{1771b094-34ae-aae7-9e20-62d7e6b77e09}">
           <p14:sldIdLst>
             <p14:sldId id="256"/>
             <p14:sldId id="257"/>
           </p14:sldIdLst>
         </p14:section>
-        <p14:section name="Warm-up on the machine" id="{48353009-a99e-22f6-6f53-66403923550e}">
+        <p14:section name="Warm-up on the machine" id="{e046e62e-ee24-0b31-3e3b-684f5335c93b}">
           <p14:sldIdLst>
             <p14:sldId id="258"/>
           </p14:sldIdLst>
         </p14:section>
-        <p14:section name="Back to the machine" id="{69cd8915-9a27-da35-3bfa-a1ee260d0977}">
+        <p14:section name="Back to the machine" id="{54cfa227-1c43-cd05-7687-7efcd23ccf2f}">
           <p14:sldIdLst>
             <p14:sldId id="259"/>
             <p14:sldId id="260"/>
           </p14:sldIdLst>
         </p14:section>
-        <p14:section name="The complete program" id="{37758c11-85ad-550a-f9f4-98c6c80fb480}">
+        <p14:section name="The complete program" id="{654b4580-b1e5-b226-1b58-3a25d719c0e6}">
           <p14:sldIdLst>
             <p14:sldId id="261"/>
             <p14:sldId id="262"/>
             <p14:sldId id="263"/>
           </p14:sldIdLst>
         </p14:section>
-        <p14:section name="Run it and test it" id="{16b82549-780c-b41d-d835-757c42fee3c2}">
+        <p14:section name="Run it and test it" id="{51edb890-5a08-4d41-775c-b931ff6a0853}">
           <p14:sldIdLst>
             <p14:sldId id="264"/>
             <p14:sldId id="265"/>
@@ -153,7 +153,7 @@
             <p14:sldId id="268"/>
           </p14:sldIdLst>
         </p14:section>
-        <p14:section name="Exercises" id="{ff2bde94-4126-e5d4-1a24-96a9e94fe3b8}">
+        <p14:section name="Exercises" id="{22dfa989-1b4d-4285-997a-661cdda0c7fe}">
           <p14:sldIdLst>
             <p14:sldId id="269"/>
           </p14:sldIdLst>
